--- a/7. Risk and Return Cost of Capital.pptx
+++ b/7. Risk and Return Cost of Capital.pptx
@@ -223,7 +223,7 @@
           <a:p>
             <a:fld id="{7E62B2E0-41D4-4BD0-8F27-233CF851A423}" type="datetimeFigureOut">
               <a:rPr lang="en-US" smtClean="0"/>
-              <a:t>2/18/2026</a:t>
+              <a:t>2/21/2026</a:t>
             </a:fld>
             <a:endParaRPr lang="en-US" dirty="0"/>
           </a:p>
@@ -3953,7 +3953,7 @@
           <a:p>
             <a:fld id="{5F466308-2A9A-43A3-8189-DAED754C8691}" type="datetime1">
               <a:rPr lang="en-US" smtClean="0"/>
-              <a:t>2/18/2026</a:t>
+              <a:t>2/21/2026</a:t>
             </a:fld>
             <a:endParaRPr lang="en-US" dirty="0"/>
           </a:p>
@@ -4267,7 +4267,7 @@
           <a:p>
             <a:fld id="{FC51178D-1D9D-49FF-BA4D-77D5F3F2ABE7}" type="datetime1">
               <a:rPr lang="en-US" smtClean="0"/>
-              <a:t>2/18/2026</a:t>
+              <a:t>2/21/2026</a:t>
             </a:fld>
             <a:endParaRPr lang="en-US" dirty="0"/>
           </a:p>
@@ -4576,7 +4576,7 @@
           <a:p>
             <a:fld id="{84A73D5F-7352-4D75-84BB-BEEE96694360}" type="datetime1">
               <a:rPr lang="en-US" smtClean="0"/>
-              <a:t>2/18/2026</a:t>
+              <a:t>2/21/2026</a:t>
             </a:fld>
             <a:endParaRPr lang="en-US" dirty="0"/>
           </a:p>
@@ -5005,7 +5005,7 @@
           <a:p>
             <a:fld id="{73AEC2FA-EF00-4A47-8C60-11D9B66273AB}" type="datetime1">
               <a:rPr lang="en-US" smtClean="0"/>
-              <a:t>2/18/2026</a:t>
+              <a:t>2/21/2026</a:t>
             </a:fld>
             <a:endParaRPr lang="en-US" dirty="0"/>
           </a:p>
@@ -5174,7 +5174,7 @@
           <a:p>
             <a:fld id="{69C03762-E4E4-41FB-87AC-4875A8A25370}" type="datetime1">
               <a:rPr lang="en-US" smtClean="0"/>
-              <a:t>2/18/2026</a:t>
+              <a:t>2/21/2026</a:t>
             </a:fld>
             <a:endParaRPr lang="en-US" dirty="0"/>
           </a:p>
@@ -5269,7 +5269,7 @@
           <a:p>
             <a:fld id="{663153EE-997E-48D6-BC05-B28D307B015C}" type="datetime1">
               <a:rPr lang="en-US" smtClean="0"/>
-              <a:t>2/18/2026</a:t>
+              <a:t>2/21/2026</a:t>
             </a:fld>
             <a:endParaRPr lang="en-US" dirty="0"/>
           </a:p>
@@ -5654,7 +5654,7 @@
           <a:p>
             <a:fld id="{E67CB83A-8CDA-4EB5-9F88-80628B7C644C}" type="datetime1">
               <a:rPr lang="en-US" smtClean="0"/>
-              <a:t>2/18/2026</a:t>
+              <a:t>2/21/2026</a:t>
             </a:fld>
             <a:endParaRPr lang="en-US" dirty="0"/>
           </a:p>
@@ -5942,7 +5942,7 @@
           <a:p>
             <a:fld id="{22FEB533-51F5-4A09-A69B-BDA5FA92A366}" type="datetime1">
               <a:rPr lang="en-US" smtClean="0"/>
-              <a:t>2/18/2026</a:t>
+              <a:t>2/21/2026</a:t>
             </a:fld>
             <a:endParaRPr lang="en-US" dirty="0"/>
           </a:p>
@@ -6179,7 +6179,7 @@
           <a:p>
             <a:fld id="{31C11933-86B0-441A-B639-BD29FDFEFE70}" type="datetime1">
               <a:rPr lang="en-US" smtClean="0"/>
-              <a:t>2/18/2026</a:t>
+              <a:t>2/21/2026</a:t>
             </a:fld>
             <a:endParaRPr lang="en-US" dirty="0"/>
           </a:p>
@@ -6421,7 +6421,7 @@
           <a:p>
             <a:fld id="{74662F02-AFBF-41E7-AC4B-D00C212D7A74}" type="datetime1">
               <a:rPr lang="en-US" smtClean="0"/>
-              <a:t>2/18/2026</a:t>
+              <a:t>2/21/2026</a:t>
             </a:fld>
             <a:endParaRPr lang="en-US" dirty="0"/>
           </a:p>
@@ -10139,7 +10139,7 @@
           <a:p>
             <a:fld id="{BC9AB8A9-18BE-4EDF-90DD-E48A588FE9E1}" type="datetime1">
               <a:rPr lang="en-US" smtClean="0"/>
-              <a:t>2/18/2026</a:t>
+              <a:t>2/21/2026</a:t>
             </a:fld>
             <a:endParaRPr lang="en-US" dirty="0"/>
           </a:p>
@@ -10964,7 +10964,7 @@
           <a:p>
             <a:fld id="{64819377-49A4-4FAF-9376-1B9935A96765}" type="datetime1">
               <a:rPr lang="en-US" smtClean="0"/>
-              <a:t>2/18/2026</a:t>
+              <a:t>2/21/2026</a:t>
             </a:fld>
             <a:endParaRPr lang="en-US" dirty="0"/>
           </a:p>
@@ -12316,8 +12316,8 @@
           </a:p>
         </p:txBody>
       </p:sp>
-      <mc:AlternateContent xmlns:mc="http://schemas.openxmlformats.org/markup-compatibility/2006">
-        <mc:Choice xmlns:a14="http://schemas.microsoft.com/office/drawing/2010/main" Requires="a14">
+      <mc:AlternateContent xmlns:mc="http://schemas.openxmlformats.org/markup-compatibility/2006" xmlns:a14="http://schemas.microsoft.com/office/drawing/2010/main">
+        <mc:Choice Requires="a14">
           <p:sp>
             <p:nvSpPr>
               <p:cNvPr id="25" name="Content Placeholder 2">
@@ -12399,7 +12399,7 @@
             </p:txBody>
           </p:sp>
         </mc:Choice>
-        <mc:Fallback>
+        <mc:Fallback xmlns="">
           <p:sp>
             <p:nvSpPr>
               <p:cNvPr id="25" name="Content Placeholder 2">
@@ -12595,8 +12595,8 @@
           </a:p>
         </p:txBody>
       </p:sp>
-      <mc:AlternateContent xmlns:mc="http://schemas.openxmlformats.org/markup-compatibility/2006">
-        <mc:Choice xmlns:a14="http://schemas.microsoft.com/office/drawing/2010/main" Requires="a14">
+      <mc:AlternateContent xmlns:mc="http://schemas.openxmlformats.org/markup-compatibility/2006" xmlns:a14="http://schemas.microsoft.com/office/drawing/2010/main">
+        <mc:Choice Requires="a14">
           <p:sp>
             <p:nvSpPr>
               <p:cNvPr id="25" name="Content Placeholder 2">
@@ -12810,7 +12810,7 @@
             </p:txBody>
           </p:sp>
         </mc:Choice>
-        <mc:Fallback>
+        <mc:Fallback xmlns="">
           <p:sp>
             <p:nvSpPr>
               <p:cNvPr id="25" name="Content Placeholder 2">
@@ -12854,8 +12854,8 @@
           </p:sp>
         </mc:Fallback>
       </mc:AlternateContent>
-      <mc:AlternateContent xmlns:mc="http://schemas.openxmlformats.org/markup-compatibility/2006">
-        <mc:Choice xmlns:a14="http://schemas.microsoft.com/office/drawing/2010/main" Requires="a14">
+      <mc:AlternateContent xmlns:mc="http://schemas.openxmlformats.org/markup-compatibility/2006" xmlns:a14="http://schemas.microsoft.com/office/drawing/2010/main">
+        <mc:Choice Requires="a14">
           <p:sp>
             <p:nvSpPr>
               <p:cNvPr id="3" name="Content Placeholder 2">
@@ -13230,7 +13230,7 @@
             </p:txBody>
           </p:sp>
         </mc:Choice>
-        <mc:Fallback>
+        <mc:Fallback xmlns="">
           <p:sp>
             <p:nvSpPr>
               <p:cNvPr id="3" name="Content Placeholder 2">
@@ -13381,8 +13381,8 @@
           </a:p>
         </p:txBody>
       </p:sp>
-      <mc:AlternateContent xmlns:mc="http://schemas.openxmlformats.org/markup-compatibility/2006">
-        <mc:Choice xmlns:a14="http://schemas.microsoft.com/office/drawing/2010/main" Requires="a14">
+      <mc:AlternateContent xmlns:mc="http://schemas.openxmlformats.org/markup-compatibility/2006" xmlns:a14="http://schemas.microsoft.com/office/drawing/2010/main">
+        <mc:Choice Requires="a14">
           <p:sp>
             <p:nvSpPr>
               <p:cNvPr id="10" name="Content Placeholder 2">
@@ -13496,7 +13496,7 @@
             </p:txBody>
           </p:sp>
         </mc:Choice>
-        <mc:Fallback>
+        <mc:Fallback xmlns="">
           <p:sp>
             <p:nvSpPr>
               <p:cNvPr id="10" name="Content Placeholder 2">
@@ -14085,8 +14085,8 @@
           </a:p>
         </p:txBody>
       </p:sp>
-      <mc:AlternateContent xmlns:mc="http://schemas.openxmlformats.org/markup-compatibility/2006">
-        <mc:Choice xmlns:a14="http://schemas.microsoft.com/office/drawing/2010/main" Requires="a14">
+      <mc:AlternateContent xmlns:mc="http://schemas.openxmlformats.org/markup-compatibility/2006" xmlns:a14="http://schemas.microsoft.com/office/drawing/2010/main">
+        <mc:Choice Requires="a14">
           <p:sp>
             <p:nvSpPr>
               <p:cNvPr id="10" name="Content Placeholder 2">
@@ -14182,7 +14182,7 @@
             </p:txBody>
           </p:sp>
         </mc:Choice>
-        <mc:Fallback>
+        <mc:Fallback xmlns="">
           <p:sp>
             <p:nvSpPr>
               <p:cNvPr id="10" name="Content Placeholder 2">
@@ -14570,8 +14570,8 @@
           </a:p>
         </p:txBody>
       </p:sp>
-      <mc:AlternateContent xmlns:mc="http://schemas.openxmlformats.org/markup-compatibility/2006">
-        <mc:Choice xmlns:a14="http://schemas.microsoft.com/office/drawing/2010/main" Requires="a14">
+      <mc:AlternateContent xmlns:mc="http://schemas.openxmlformats.org/markup-compatibility/2006" xmlns:a14="http://schemas.microsoft.com/office/drawing/2010/main">
+        <mc:Choice Requires="a14">
           <p:sp>
             <p:nvSpPr>
               <p:cNvPr id="10" name="Content Placeholder 2">
@@ -14935,7 +14935,7 @@
             </p:txBody>
           </p:sp>
         </mc:Choice>
-        <mc:Fallback>
+        <mc:Fallback xmlns="">
           <p:sp>
             <p:nvSpPr>
               <p:cNvPr id="10" name="Content Placeholder 2">
@@ -15101,8 +15101,8 @@
           </a:p>
         </p:txBody>
       </p:sp>
-      <mc:AlternateContent xmlns:mc="http://schemas.openxmlformats.org/markup-compatibility/2006">
-        <mc:Choice xmlns:a14="http://schemas.microsoft.com/office/drawing/2010/main" Requires="a14">
+      <mc:AlternateContent xmlns:mc="http://schemas.openxmlformats.org/markup-compatibility/2006" xmlns:a14="http://schemas.microsoft.com/office/drawing/2010/main">
+        <mc:Choice Requires="a14">
           <p:sp>
             <p:nvSpPr>
               <p:cNvPr id="10" name="Content Placeholder 2">
@@ -15189,7 +15189,7 @@
             </p:txBody>
           </p:sp>
         </mc:Choice>
-        <mc:Fallback>
+        <mc:Fallback xmlns="">
           <p:sp>
             <p:nvSpPr>
               <p:cNvPr id="10" name="Content Placeholder 2">
@@ -17359,8 +17359,13 @@
             </a:pPr>
             <a:r>
               <a:rPr lang="en-US" sz="2000" dirty="0"/>
-              <a:t>Types of Risk</a:t>
-            </a:r>
+              <a:t>Types </a:t>
+            </a:r>
+            <a:r>
+              <a:rPr lang="en-US" sz="2000"/>
+              <a:t>of Risks</a:t>
+            </a:r>
+            <a:endParaRPr lang="en-US" sz="2000" dirty="0"/>
           </a:p>
           <a:p>
             <a:pPr>
@@ -19115,8 +19120,8 @@
           </a:p>
         </p:txBody>
       </p:sp>
-      <mc:AlternateContent xmlns:mc="http://schemas.openxmlformats.org/markup-compatibility/2006">
-        <mc:Choice xmlns:a14="http://schemas.microsoft.com/office/drawing/2010/main" Requires="a14">
+      <mc:AlternateContent xmlns:mc="http://schemas.openxmlformats.org/markup-compatibility/2006" xmlns:a14="http://schemas.microsoft.com/office/drawing/2010/main">
+        <mc:Choice Requires="a14">
           <p:sp>
             <p:nvSpPr>
               <p:cNvPr id="10" name="Content Placeholder 2">
@@ -19240,7 +19245,7 @@
             </p:txBody>
           </p:sp>
         </mc:Choice>
-        <mc:Fallback>
+        <mc:Fallback xmlns="">
           <p:sp>
             <p:nvSpPr>
               <p:cNvPr id="10" name="Content Placeholder 2">
@@ -19556,8 +19561,8 @@
           </a:graphicData>
         </a:graphic>
       </p:graphicFrame>
-      <mc:AlternateContent xmlns:mc="http://schemas.openxmlformats.org/markup-compatibility/2006">
-        <mc:Choice xmlns:a14="http://schemas.microsoft.com/office/drawing/2010/main" Requires="a14">
+      <mc:AlternateContent xmlns:mc="http://schemas.openxmlformats.org/markup-compatibility/2006" xmlns:a14="http://schemas.microsoft.com/office/drawing/2010/main">
+        <mc:Choice Requires="a14">
           <p:sp>
             <p:nvSpPr>
               <p:cNvPr id="5" name="Content Placeholder 2">
@@ -19846,7 +19851,7 @@
             </p:txBody>
           </p:sp>
         </mc:Choice>
-        <mc:Fallback>
+        <mc:Fallback xmlns="">
           <p:sp>
             <p:nvSpPr>
               <p:cNvPr id="5" name="Content Placeholder 2">
@@ -19967,8 +19972,8 @@
           </a:p>
         </p:txBody>
       </p:sp>
-      <mc:AlternateContent xmlns:mc="http://schemas.openxmlformats.org/markup-compatibility/2006">
-        <mc:Choice xmlns:a14="http://schemas.microsoft.com/office/drawing/2010/main" Requires="a14">
+      <mc:AlternateContent xmlns:mc="http://schemas.openxmlformats.org/markup-compatibility/2006" xmlns:a14="http://schemas.microsoft.com/office/drawing/2010/main">
+        <mc:Choice Requires="a14">
           <p:sp>
             <p:nvSpPr>
               <p:cNvPr id="10" name="Content Placeholder 2">
@@ -20086,7 +20091,7 @@
             </p:txBody>
           </p:sp>
         </mc:Choice>
-        <mc:Fallback>
+        <mc:Fallback xmlns="">
           <p:sp>
             <p:nvSpPr>
               <p:cNvPr id="10" name="Content Placeholder 2">
@@ -20176,8 +20181,8 @@
           </a:p>
         </p:txBody>
       </p:sp>
-      <mc:AlternateContent xmlns:mc="http://schemas.openxmlformats.org/markup-compatibility/2006">
-        <mc:Choice xmlns:a14="http://schemas.microsoft.com/office/drawing/2010/main" Requires="a14">
+      <mc:AlternateContent xmlns:mc="http://schemas.openxmlformats.org/markup-compatibility/2006" xmlns:a14="http://schemas.microsoft.com/office/drawing/2010/main">
+        <mc:Choice Requires="a14">
           <p:sp>
             <p:nvSpPr>
               <p:cNvPr id="8" name="Text 9">
@@ -20488,7 +20493,7 @@
             </p:txBody>
           </p:sp>
         </mc:Choice>
-        <mc:Fallback>
+        <mc:Fallback xmlns="">
           <p:sp>
             <p:nvSpPr>
               <p:cNvPr id="8" name="Text 9">
@@ -20534,8 +20539,8 @@
           </p:sp>
         </mc:Fallback>
       </mc:AlternateContent>
-      <mc:AlternateContent xmlns:mc="http://schemas.openxmlformats.org/markup-compatibility/2006">
-        <mc:Choice xmlns:a14="http://schemas.microsoft.com/office/drawing/2010/main" Requires="a14">
+      <mc:AlternateContent xmlns:mc="http://schemas.openxmlformats.org/markup-compatibility/2006" xmlns:a14="http://schemas.microsoft.com/office/drawing/2010/main">
+        <mc:Choice Requires="a14">
           <p:sp>
             <p:nvSpPr>
               <p:cNvPr id="9" name="Content Placeholder 2">
@@ -20949,7 +20954,7 @@
             </p:txBody>
           </p:sp>
         </mc:Choice>
-        <mc:Fallback>
+        <mc:Fallback xmlns="">
           <p:sp>
             <p:nvSpPr>
               <p:cNvPr id="9" name="Content Placeholder 2">
@@ -21154,8 +21159,8 @@
           </a:p>
         </p:txBody>
       </p:sp>
-      <mc:AlternateContent xmlns:mc="http://schemas.openxmlformats.org/markup-compatibility/2006">
-        <mc:Choice xmlns:a14="http://schemas.microsoft.com/office/drawing/2010/main" Requires="a14">
+      <mc:AlternateContent xmlns:mc="http://schemas.openxmlformats.org/markup-compatibility/2006" xmlns:a14="http://schemas.microsoft.com/office/drawing/2010/main">
+        <mc:Choice Requires="a14">
           <p:sp>
             <p:nvSpPr>
               <p:cNvPr id="9" name="Content Placeholder 2">
@@ -21431,7 +21436,7 @@
             </p:txBody>
           </p:sp>
         </mc:Choice>
-        <mc:Fallback>
+        <mc:Fallback xmlns="">
           <p:sp>
             <p:nvSpPr>
               <p:cNvPr id="9" name="Content Placeholder 2">
@@ -21895,8 +21900,8 @@
           </a:graphicData>
         </a:graphic>
       </p:graphicFrame>
-      <mc:AlternateContent xmlns:mc="http://schemas.openxmlformats.org/markup-compatibility/2006">
-        <mc:Choice xmlns:a14="http://schemas.microsoft.com/office/drawing/2010/main" Requires="a14">
+      <mc:AlternateContent xmlns:mc="http://schemas.openxmlformats.org/markup-compatibility/2006" xmlns:a14="http://schemas.microsoft.com/office/drawing/2010/main">
+        <mc:Choice Requires="a14">
           <p:sp>
             <p:nvSpPr>
               <p:cNvPr id="5" name="Shape 8">
@@ -22033,7 +22038,7 @@
             </p:txBody>
           </p:sp>
         </mc:Choice>
-        <mc:Fallback>
+        <mc:Fallback xmlns="">
           <p:sp>
             <p:nvSpPr>
               <p:cNvPr id="5" name="Shape 8">
@@ -22281,8 +22286,8 @@
           </a:p>
         </p:txBody>
       </p:sp>
-      <mc:AlternateContent xmlns:mc="http://schemas.openxmlformats.org/markup-compatibility/2006">
-        <mc:Choice xmlns:a14="http://schemas.microsoft.com/office/drawing/2010/main" Requires="a14">
+      <mc:AlternateContent xmlns:mc="http://schemas.openxmlformats.org/markup-compatibility/2006" xmlns:a14="http://schemas.microsoft.com/office/drawing/2010/main">
+        <mc:Choice Requires="a14">
           <p:sp>
             <p:nvSpPr>
               <p:cNvPr id="16" name="Text 15">
@@ -22724,7 +22729,7 @@
             </p:txBody>
           </p:sp>
         </mc:Choice>
-        <mc:Fallback>
+        <mc:Fallback xmlns="">
           <p:sp>
             <p:nvSpPr>
               <p:cNvPr id="16" name="Text 15">
@@ -22813,8 +22818,8 @@
           </a:p>
         </p:txBody>
       </p:sp>
-      <mc:AlternateContent xmlns:mc="http://schemas.openxmlformats.org/markup-compatibility/2006">
-        <mc:Choice xmlns:a14="http://schemas.microsoft.com/office/drawing/2010/main" Requires="a14">
+      <mc:AlternateContent xmlns:mc="http://schemas.openxmlformats.org/markup-compatibility/2006" xmlns:a14="http://schemas.microsoft.com/office/drawing/2010/main">
+        <mc:Choice Requires="a14">
           <p:sp>
             <p:nvSpPr>
               <p:cNvPr id="19" name="Text 8">
@@ -22969,7 +22974,7 @@
             </p:txBody>
           </p:sp>
         </mc:Choice>
-        <mc:Fallback>
+        <mc:Fallback xmlns="">
           <p:sp>
             <p:nvSpPr>
               <p:cNvPr id="19" name="Text 8">
@@ -23015,8 +23020,8 @@
           </p:sp>
         </mc:Fallback>
       </mc:AlternateContent>
-      <mc:AlternateContent xmlns:mc="http://schemas.openxmlformats.org/markup-compatibility/2006">
-        <mc:Choice xmlns:a14="http://schemas.microsoft.com/office/drawing/2010/main" Requires="a14">
+      <mc:AlternateContent xmlns:mc="http://schemas.openxmlformats.org/markup-compatibility/2006" xmlns:a14="http://schemas.microsoft.com/office/drawing/2010/main">
+        <mc:Choice Requires="a14">
           <p:sp>
             <p:nvSpPr>
               <p:cNvPr id="20" name="Text 9">
@@ -23105,7 +23110,7 @@
             </p:txBody>
           </p:sp>
         </mc:Choice>
-        <mc:Fallback>
+        <mc:Fallback xmlns="">
           <p:sp>
             <p:nvSpPr>
               <p:cNvPr id="20" name="Text 9">
@@ -23252,8 +23257,8 @@
             </a:p>
           </p:txBody>
         </p:sp>
-        <mc:AlternateContent xmlns:mc="http://schemas.openxmlformats.org/markup-compatibility/2006">
-          <mc:Choice xmlns:a14="http://schemas.microsoft.com/office/drawing/2010/main" Requires="a14">
+        <mc:AlternateContent xmlns:mc="http://schemas.openxmlformats.org/markup-compatibility/2006" xmlns:a14="http://schemas.microsoft.com/office/drawing/2010/main">
+          <mc:Choice Requires="a14">
             <p:sp>
               <p:nvSpPr>
                 <p:cNvPr id="22" name="Text 12">
@@ -23452,7 +23457,7 @@
               </p:txBody>
             </p:sp>
           </mc:Choice>
-          <mc:Fallback>
+          <mc:Fallback xmlns="">
             <p:sp>
               <p:nvSpPr>
                 <p:cNvPr id="22" name="Text 12">
@@ -23498,8 +23503,8 @@
             </p:sp>
           </mc:Fallback>
         </mc:AlternateContent>
-        <mc:AlternateContent xmlns:mc="http://schemas.openxmlformats.org/markup-compatibility/2006">
-          <mc:Choice xmlns:a14="http://schemas.microsoft.com/office/drawing/2010/main" Requires="a14">
+        <mc:AlternateContent xmlns:mc="http://schemas.openxmlformats.org/markup-compatibility/2006" xmlns:a14="http://schemas.microsoft.com/office/drawing/2010/main">
+          <mc:Choice Requires="a14">
             <p:sp>
               <p:nvSpPr>
                 <p:cNvPr id="23" name="Text 13">
@@ -23603,7 +23608,7 @@
               </p:txBody>
             </p:sp>
           </mc:Choice>
-          <mc:Fallback>
+          <mc:Fallback xmlns="">
             <p:sp>
               <p:nvSpPr>
                 <p:cNvPr id="23" name="Text 13">
@@ -23726,8 +23731,8 @@
           </a:p>
         </p:txBody>
       </p:sp>
-      <mc:AlternateContent xmlns:mc="http://schemas.openxmlformats.org/markup-compatibility/2006">
-        <mc:Choice xmlns:a14="http://schemas.microsoft.com/office/drawing/2010/main" Requires="a14">
+      <mc:AlternateContent xmlns:mc="http://schemas.openxmlformats.org/markup-compatibility/2006" xmlns:a14="http://schemas.microsoft.com/office/drawing/2010/main">
+        <mc:Choice Requires="a14">
           <p:sp>
             <p:nvSpPr>
               <p:cNvPr id="10" name="Content Placeholder 2">
@@ -23833,7 +23838,7 @@
             </p:txBody>
           </p:sp>
         </mc:Choice>
-        <mc:Fallback>
+        <mc:Fallback xmlns="">
           <p:sp>
             <p:nvSpPr>
               <p:cNvPr id="10" name="Content Placeholder 2">
